--- a/fault3r.pptx
+++ b/fault3r.pptx
@@ -20,7 +20,7 @@
     <p:sldId id="267" r:id="rId11"/>
     <p:sldId id="266" r:id="rId12"/>
     <p:sldId id="268" r:id="rId13"/>
-    <p:sldId id="269" r:id="rId14"/>
+    <p:sldId id="270" r:id="rId14"/>
     <p:sldId id="261" r:id="rId15"/>
   </p:sldIdLst>
   <p:sldSz cx="12192000" cy="6858000"/>
@@ -120,6 +120,11 @@
       </a:defRPr>
     </a:lvl9pPr>
   </p:defaultTextStyle>
+  <p:extLst>
+    <p:ext uri="{EFAFB233-063F-42B5-8137-9DF3F51BA10A}">
+      <p15:sldGuideLst xmlns:p15="http://schemas.microsoft.com/office/powerpoint/2012/main"/>
+    </p:ext>
+  </p:extLst>
 </p:presentation>
 </file>
 
@@ -205,7 +210,7 @@
           <a:p>
             <a:fld id="{5A0BDA87-1D0C-EB4F-9945-E8CF4B851A06}" type="datetimeFigureOut">
               <a:rPr lang="en-US" smtClean="0"/>
-              <a:t>5/10/26</a:t>
+              <a:t>5/11/26</a:t>
             </a:fld>
             <a:endParaRPr lang="en-US"/>
           </a:p>
@@ -809,9 +814,9 @@
           <a:bodyPr/>
           <a:lstStyle/>
           <a:p>
-            <a:fld id="{785CD6E9-BBD9-954C-91C2-A5274CEFC828}" type="datetimeFigureOut">
+            <a:fld id="{4C394A38-FE71-6B4D-ACF0-F033CFD87265}" type="datetime1">
               <a:rPr lang="en-US" smtClean="0"/>
-              <a:t>5/10/26</a:t>
+              <a:t>5/11/26</a:t>
             </a:fld>
             <a:endParaRPr lang="en-US"/>
           </a:p>
@@ -1007,9 +1012,9 @@
           <a:bodyPr/>
           <a:lstStyle/>
           <a:p>
-            <a:fld id="{785CD6E9-BBD9-954C-91C2-A5274CEFC828}" type="datetimeFigureOut">
+            <a:fld id="{A52568B1-CFEF-6F4A-87B3-BF555BC4158C}" type="datetime1">
               <a:rPr lang="en-US" smtClean="0"/>
-              <a:t>5/10/26</a:t>
+              <a:t>5/11/26</a:t>
             </a:fld>
             <a:endParaRPr lang="en-US"/>
           </a:p>
@@ -1215,9 +1220,9 @@
           <a:bodyPr/>
           <a:lstStyle/>
           <a:p>
-            <a:fld id="{785CD6E9-BBD9-954C-91C2-A5274CEFC828}" type="datetimeFigureOut">
+            <a:fld id="{D1630D02-9023-6C43-B4CB-37E9AC9FBAD6}" type="datetime1">
               <a:rPr lang="en-US" smtClean="0"/>
-              <a:t>5/10/26</a:t>
+              <a:t>5/11/26</a:t>
             </a:fld>
             <a:endParaRPr lang="en-US"/>
           </a:p>
@@ -1413,9 +1418,9 @@
           <a:bodyPr/>
           <a:lstStyle/>
           <a:p>
-            <a:fld id="{785CD6E9-BBD9-954C-91C2-A5274CEFC828}" type="datetimeFigureOut">
+            <a:fld id="{0DE0EE8C-BCB2-874D-A6A8-AA94849D2BB7}" type="datetime1">
               <a:rPr lang="en-US" smtClean="0"/>
-              <a:t>5/10/26</a:t>
+              <a:t>5/11/26</a:t>
             </a:fld>
             <a:endParaRPr lang="en-US"/>
           </a:p>
@@ -1688,9 +1693,9 @@
           <a:bodyPr/>
           <a:lstStyle/>
           <a:p>
-            <a:fld id="{785CD6E9-BBD9-954C-91C2-A5274CEFC828}" type="datetimeFigureOut">
+            <a:fld id="{3DA56B08-505F-4544-A61D-33097EDF03A1}" type="datetime1">
               <a:rPr lang="en-US" smtClean="0"/>
-              <a:t>5/10/26</a:t>
+              <a:t>5/11/26</a:t>
             </a:fld>
             <a:endParaRPr lang="en-US"/>
           </a:p>
@@ -1953,9 +1958,9 @@
           <a:bodyPr/>
           <a:lstStyle/>
           <a:p>
-            <a:fld id="{785CD6E9-BBD9-954C-91C2-A5274CEFC828}" type="datetimeFigureOut">
+            <a:fld id="{8B0F3756-FB7B-C144-8821-EB0F76CAD305}" type="datetime1">
               <a:rPr lang="en-US" smtClean="0"/>
-              <a:t>5/10/26</a:t>
+              <a:t>5/11/26</a:t>
             </a:fld>
             <a:endParaRPr lang="en-US"/>
           </a:p>
@@ -2365,9 +2370,9 @@
           <a:bodyPr/>
           <a:lstStyle/>
           <a:p>
-            <a:fld id="{785CD6E9-BBD9-954C-91C2-A5274CEFC828}" type="datetimeFigureOut">
+            <a:fld id="{57902517-0DC5-3843-AB9C-A33859D5FB6D}" type="datetime1">
               <a:rPr lang="en-US" smtClean="0"/>
-              <a:t>5/10/26</a:t>
+              <a:t>5/11/26</a:t>
             </a:fld>
             <a:endParaRPr lang="en-US"/>
           </a:p>
@@ -2506,9 +2511,9 @@
           <a:bodyPr/>
           <a:lstStyle/>
           <a:p>
-            <a:fld id="{785CD6E9-BBD9-954C-91C2-A5274CEFC828}" type="datetimeFigureOut">
+            <a:fld id="{83205230-E167-D348-9552-D1C801CCE807}" type="datetime1">
               <a:rPr lang="en-US" smtClean="0"/>
-              <a:t>5/10/26</a:t>
+              <a:t>5/11/26</a:t>
             </a:fld>
             <a:endParaRPr lang="en-US"/>
           </a:p>
@@ -2619,9 +2624,9 @@
           <a:bodyPr/>
           <a:lstStyle/>
           <a:p>
-            <a:fld id="{785CD6E9-BBD9-954C-91C2-A5274CEFC828}" type="datetimeFigureOut">
+            <a:fld id="{4AFCB485-0CDB-BD4E-A711-5BD79C325D2D}" type="datetime1">
               <a:rPr lang="en-US" smtClean="0"/>
-              <a:t>5/10/26</a:t>
+              <a:t>5/11/26</a:t>
             </a:fld>
             <a:endParaRPr lang="en-US"/>
           </a:p>
@@ -2930,9 +2935,9 @@
           <a:bodyPr/>
           <a:lstStyle/>
           <a:p>
-            <a:fld id="{785CD6E9-BBD9-954C-91C2-A5274CEFC828}" type="datetimeFigureOut">
+            <a:fld id="{74F45047-6B98-2742-AFA3-ACBFECB1B056}" type="datetime1">
               <a:rPr lang="en-US" smtClean="0"/>
-              <a:t>5/10/26</a:t>
+              <a:t>5/11/26</a:t>
             </a:fld>
             <a:endParaRPr lang="en-US"/>
           </a:p>
@@ -3218,9 +3223,9 @@
           <a:bodyPr/>
           <a:lstStyle/>
           <a:p>
-            <a:fld id="{785CD6E9-BBD9-954C-91C2-A5274CEFC828}" type="datetimeFigureOut">
+            <a:fld id="{1E374BCF-D5F0-1646-8F23-955A1EED1E51}" type="datetime1">
               <a:rPr lang="en-US" smtClean="0"/>
-              <a:t>5/10/26</a:t>
+              <a:t>5/11/26</a:t>
             </a:fld>
             <a:endParaRPr lang="en-US"/>
           </a:p>
@@ -3459,9 +3464,9 @@
             </a:lvl1pPr>
           </a:lstStyle>
           <a:p>
-            <a:fld id="{785CD6E9-BBD9-954C-91C2-A5274CEFC828}" type="datetimeFigureOut">
+            <a:fld id="{D6802F72-2D6E-CC42-8AD9-CC780CA33D56}" type="datetime1">
               <a:rPr lang="en-US" smtClean="0"/>
-              <a:t>5/10/26</a:t>
+              <a:t>5/11/26</a:t>
             </a:fld>
             <a:endParaRPr lang="en-US"/>
           </a:p>
@@ -3578,6 +3583,7 @@
     <p:sldLayoutId id="2147483658" r:id="rId10"/>
     <p:sldLayoutId id="2147483659" r:id="rId11"/>
   </p:sldLayoutIdLst>
+  <p:hf hdr="0" ftr="0" dt="0"/>
   <p:txStyles>
     <p:titleStyle>
       <a:lvl1pPr algn="l" defTabSz="914400" rtl="0" eaLnBrk="1" latinLnBrk="0" hangingPunct="1">
@@ -4017,6 +4023,35 @@
           </a:p>
         </p:txBody>
       </p:sp>
+      <p:sp>
+        <p:nvSpPr>
+          <p:cNvPr id="4" name="Slide Number Placeholder 3">
+            <a:extLst>
+              <a:ext uri="{FF2B5EF4-FFF2-40B4-BE49-F238E27FC236}">
+                <a16:creationId xmlns:a16="http://schemas.microsoft.com/office/drawing/2014/main" id="{492032B5-5857-73A5-F0A7-0F2C56B2B6D4}"/>
+              </a:ext>
+            </a:extLst>
+          </p:cNvPr>
+          <p:cNvSpPr>
+            <a:spLocks noGrp="1"/>
+          </p:cNvSpPr>
+          <p:nvPr>
+            <p:ph type="sldNum" sz="quarter" idx="12"/>
+          </p:nvPr>
+        </p:nvSpPr>
+        <p:spPr/>
+        <p:txBody>
+          <a:bodyPr/>
+          <a:lstStyle/>
+          <a:p>
+            <a:fld id="{A900D188-C617-EB4E-BEE6-4D3EBC686279}" type="slidenum">
+              <a:rPr lang="en-US" smtClean="0"/>
+              <a:t>1</a:t>
+            </a:fld>
+            <a:endParaRPr lang="en-US"/>
+          </a:p>
+        </p:txBody>
+      </p:sp>
     </p:spTree>
     <p:extLst>
       <p:ext uri="{BB962C8B-B14F-4D97-AF65-F5344CB8AC3E}">
@@ -5459,7 +5494,7 @@
                     <a:p>
                       <a:pPr rtl="0" fontAlgn="b"/>
                       <a:r>
-                        <a:rPr lang="en-US" sz="1300">
+                        <a:rPr lang="en-US" sz="1300" dirty="0">
                           <a:effectLst/>
                         </a:rPr>
                         <a:t>0xfe040023</a:t>
@@ -14077,6 +14112,35 @@
               <a:rPr lang="en-US" dirty="0"/>
               <a:t>1. Locate Injection Points In Simulation &amp; Inject Faults</a:t>
             </a:r>
+          </a:p>
+        </p:txBody>
+      </p:sp>
+      <p:sp>
+        <p:nvSpPr>
+          <p:cNvPr id="3" name="Slide Number Placeholder 2">
+            <a:extLst>
+              <a:ext uri="{FF2B5EF4-FFF2-40B4-BE49-F238E27FC236}">
+                <a16:creationId xmlns:a16="http://schemas.microsoft.com/office/drawing/2014/main" id="{8DD93D5F-EEC8-4428-3261-E040BA1DFD6B}"/>
+              </a:ext>
+            </a:extLst>
+          </p:cNvPr>
+          <p:cNvSpPr>
+            <a:spLocks noGrp="1"/>
+          </p:cNvSpPr>
+          <p:nvPr>
+            <p:ph type="sldNum" sz="quarter" idx="12"/>
+          </p:nvPr>
+        </p:nvSpPr>
+        <p:spPr/>
+        <p:txBody>
+          <a:bodyPr/>
+          <a:lstStyle/>
+          <a:p>
+            <a:fld id="{A900D188-C617-EB4E-BEE6-4D3EBC686279}" type="slidenum">
+              <a:rPr lang="en-US" smtClean="0"/>
+              <a:t>10</a:t>
+            </a:fld>
+            <a:endParaRPr lang="en-US"/>
           </a:p>
         </p:txBody>
       </p:sp>
@@ -14341,6 +14405,35 @@
           </a:fontRef>
         </p:style>
       </p:cxnSp>
+      <p:sp>
+        <p:nvSpPr>
+          <p:cNvPr id="3" name="Slide Number Placeholder 2">
+            <a:extLst>
+              <a:ext uri="{FF2B5EF4-FFF2-40B4-BE49-F238E27FC236}">
+                <a16:creationId xmlns:a16="http://schemas.microsoft.com/office/drawing/2014/main" id="{2CF1D42E-A10C-EE4D-A6C7-AA787A309DC5}"/>
+              </a:ext>
+            </a:extLst>
+          </p:cNvPr>
+          <p:cNvSpPr>
+            <a:spLocks noGrp="1"/>
+          </p:cNvSpPr>
+          <p:nvPr>
+            <p:ph type="sldNum" sz="quarter" idx="12"/>
+          </p:nvPr>
+        </p:nvSpPr>
+        <p:spPr/>
+        <p:txBody>
+          <a:bodyPr/>
+          <a:lstStyle/>
+          <a:p>
+            <a:fld id="{A900D188-C617-EB4E-BEE6-4D3EBC686279}" type="slidenum">
+              <a:rPr lang="en-US" smtClean="0"/>
+              <a:t>11</a:t>
+            </a:fld>
+            <a:endParaRPr lang="en-US"/>
+          </a:p>
+        </p:txBody>
+      </p:sp>
     </p:spTree>
     <p:extLst>
       <p:ext uri="{BB962C8B-B14F-4D97-AF65-F5344CB8AC3E}">
@@ -14476,7 +14569,7 @@
             </a:pPr>
             <a:r>
               <a:rPr lang="en-US" sz="2400" b="1" dirty="0"/>
-              <a:t>Return Linkage</a:t>
+              <a:t>Return Linking</a:t>
             </a:r>
             <a:r>
               <a:rPr lang="en-US" sz="2400" dirty="0"/>
@@ -14525,6 +14618,35 @@
               <a:rPr lang="en-US" sz="2400" dirty="0"/>
               <a:t> instruction targeting the new payload.</a:t>
             </a:r>
+          </a:p>
+        </p:txBody>
+      </p:sp>
+      <p:sp>
+        <p:nvSpPr>
+          <p:cNvPr id="3" name="Slide Number Placeholder 2">
+            <a:extLst>
+              <a:ext uri="{FF2B5EF4-FFF2-40B4-BE49-F238E27FC236}">
+                <a16:creationId xmlns:a16="http://schemas.microsoft.com/office/drawing/2014/main" id="{742A6650-3AE9-9201-7042-F12F2A674038}"/>
+              </a:ext>
+            </a:extLst>
+          </p:cNvPr>
+          <p:cNvSpPr>
+            <a:spLocks noGrp="1"/>
+          </p:cNvSpPr>
+          <p:nvPr>
+            <p:ph type="sldNum" sz="quarter" idx="12"/>
+          </p:nvPr>
+        </p:nvSpPr>
+        <p:spPr/>
+        <p:txBody>
+          <a:bodyPr/>
+          <a:lstStyle/>
+          <a:p>
+            <a:fld id="{A900D188-C617-EB4E-BEE6-4D3EBC686279}" type="slidenum">
+              <a:rPr lang="en-US" smtClean="0"/>
+              <a:t>12</a:t>
+            </a:fld>
+            <a:endParaRPr lang="en-US"/>
           </a:p>
         </p:txBody>
       </p:sp>
@@ -14549,7 +14671,7 @@
         <p:cNvPr id="1" name="">
           <a:extLst>
             <a:ext uri="{FF2B5EF4-FFF2-40B4-BE49-F238E27FC236}">
-              <a16:creationId xmlns:a16="http://schemas.microsoft.com/office/drawing/2014/main" id="{14F50B0A-C50F-7B22-1340-6756A0ABCD57}"/>
+              <a16:creationId xmlns:a16="http://schemas.microsoft.com/office/drawing/2014/main" id="{5F6468AF-CE78-F4AB-CD9D-5ABBC7C25012}"/>
             </a:ext>
           </a:extLst>
         </p:cNvPr>
@@ -14566,10 +14688,45 @@
       </p:grpSpPr>
       <p:sp>
         <p:nvSpPr>
-          <p:cNvPr id="2" name="Title 1">
+          <p:cNvPr id="5" name="TextBox 4">
             <a:extLst>
               <a:ext uri="{FF2B5EF4-FFF2-40B4-BE49-F238E27FC236}">
-                <a16:creationId xmlns:a16="http://schemas.microsoft.com/office/drawing/2014/main" id="{2B91C85D-0DD8-B023-1E75-8C4CE96BCCD0}"/>
+                <a16:creationId xmlns:a16="http://schemas.microsoft.com/office/drawing/2014/main" id="{9D13EBDC-D8F8-84CD-1209-BBEFC81ABFF8}"/>
+              </a:ext>
+            </a:extLst>
+          </p:cNvPr>
+          <p:cNvSpPr txBox="1"/>
+          <p:nvPr/>
+        </p:nvSpPr>
+        <p:spPr>
+          <a:xfrm>
+            <a:off x="5202166" y="3044280"/>
+            <a:ext cx="1787669" cy="769441"/>
+          </a:xfrm>
+          <a:prstGeom prst="rect">
+            <a:avLst/>
+          </a:prstGeom>
+          <a:noFill/>
+        </p:spPr>
+        <p:txBody>
+          <a:bodyPr wrap="none" rtlCol="0">
+            <a:spAutoFit/>
+          </a:bodyPr>
+          <a:lstStyle/>
+          <a:p>
+            <a:r>
+              <a:rPr lang="en-US" sz="4400" b="1" dirty="0"/>
+              <a:t>DEMO</a:t>
+            </a:r>
+          </a:p>
+        </p:txBody>
+      </p:sp>
+      <p:sp>
+        <p:nvSpPr>
+          <p:cNvPr id="6" name="Slide Number Placeholder 5">
+            <a:extLst>
+              <a:ext uri="{FF2B5EF4-FFF2-40B4-BE49-F238E27FC236}">
+                <a16:creationId xmlns:a16="http://schemas.microsoft.com/office/drawing/2014/main" id="{DB4868BA-75E8-71AD-4CCD-616F859BD2BD}"/>
               </a:ext>
             </a:extLst>
           </p:cNvPr>
@@ -14577,7 +14734,7 @@
             <a:spLocks noGrp="1"/>
           </p:cNvSpPr>
           <p:nvPr>
-            <p:ph type="title"/>
+            <p:ph type="sldNum" sz="quarter" idx="12"/>
           </p:nvPr>
         </p:nvSpPr>
         <p:spPr/>
@@ -14585,46 +14742,18 @@
           <a:bodyPr/>
           <a:lstStyle/>
           <a:p>
-            <a:r>
-              <a:rPr lang="en-US" dirty="0"/>
-              <a:t>Evaluation - jump and link based faults</a:t>
-            </a:r>
+            <a:fld id="{A900D188-C617-EB4E-BEE6-4D3EBC686279}" type="slidenum">
+              <a:rPr lang="en-US" smtClean="0"/>
+              <a:t>13</a:t>
+            </a:fld>
+            <a:endParaRPr lang="en-US"/>
           </a:p>
         </p:txBody>
       </p:sp>
-      <p:pic>
-        <p:nvPicPr>
-          <p:cNvPr id="7" name="Content Placeholder 6">
-            <a:extLst>
-              <a:ext uri="{FF2B5EF4-FFF2-40B4-BE49-F238E27FC236}">
-                <a16:creationId xmlns:a16="http://schemas.microsoft.com/office/drawing/2014/main" id="{1028FB4A-445B-C5A8-65F7-E5154A42FA6A}"/>
-              </a:ext>
-            </a:extLst>
-          </p:cNvPr>
-          <p:cNvPicPr>
-            <a:picLocks noGrp="1" noChangeAspect="1"/>
-          </p:cNvPicPr>
-          <p:nvPr>
-            <p:ph idx="1"/>
-          </p:nvPr>
-        </p:nvPicPr>
-        <p:blipFill>
-          <a:blip r:embed="rId2"/>
-          <a:stretch>
-            <a:fillRect/>
-          </a:stretch>
-        </p:blipFill>
-        <p:spPr>
-          <a:xfrm>
-            <a:off x="838200" y="3429000"/>
-            <a:ext cx="10515600" cy="1113416"/>
-          </a:xfrm>
-        </p:spPr>
-      </p:pic>
     </p:spTree>
     <p:extLst>
       <p:ext uri="{BB962C8B-B14F-4D97-AF65-F5344CB8AC3E}">
-        <p14:creationId xmlns:p14="http://schemas.microsoft.com/office/powerpoint/2010/main" val="108171441"/>
+        <p14:creationId xmlns:p14="http://schemas.microsoft.com/office/powerpoint/2010/main" val="2350398875"/>
       </p:ext>
     </p:extLst>
   </p:cSld>
@@ -14703,7 +14832,9 @@
         </p:nvSpPr>
         <p:spPr/>
         <p:txBody>
-          <a:bodyPr/>
+          <a:bodyPr>
+            <a:normAutofit lnSpcReduction="10000"/>
+          </a:bodyPr>
           <a:lstStyle/>
           <a:p>
             <a:r>
@@ -14721,6 +14852,12 @@
             <a:r>
               <a:rPr lang="en-US" dirty="0"/>
               <a:t>JAL-based faults allowing larger fault payloads.</a:t>
+            </a:r>
+          </a:p>
+          <a:p>
+            <a:r>
+              <a:rPr lang="en-US" dirty="0"/>
+              <a:t>Report Available.</a:t>
             </a:r>
           </a:p>
           <a:p>
@@ -14807,6 +14944,35 @@
           <a:lstStyle/>
           <a:p>
             <a:pPr algn="ctr"/>
+            <a:endParaRPr lang="en-US"/>
+          </a:p>
+        </p:txBody>
+      </p:sp>
+      <p:sp>
+        <p:nvSpPr>
+          <p:cNvPr id="5" name="Slide Number Placeholder 4">
+            <a:extLst>
+              <a:ext uri="{FF2B5EF4-FFF2-40B4-BE49-F238E27FC236}">
+                <a16:creationId xmlns:a16="http://schemas.microsoft.com/office/drawing/2014/main" id="{A01E6700-DA82-575B-DF40-B51EE708F1A3}"/>
+              </a:ext>
+            </a:extLst>
+          </p:cNvPr>
+          <p:cNvSpPr>
+            <a:spLocks noGrp="1"/>
+          </p:cNvSpPr>
+          <p:nvPr>
+            <p:ph type="sldNum" sz="quarter" idx="12"/>
+          </p:nvPr>
+        </p:nvSpPr>
+        <p:spPr/>
+        <p:txBody>
+          <a:bodyPr/>
+          <a:lstStyle/>
+          <a:p>
+            <a:fld id="{A900D188-C617-EB4E-BEE6-4D3EBC686279}" type="slidenum">
+              <a:rPr lang="en-US" smtClean="0"/>
+              <a:t>14</a:t>
+            </a:fld>
             <a:endParaRPr lang="en-US"/>
           </a:p>
         </p:txBody>
@@ -14887,66 +15053,104 @@
         </p:nvSpPr>
         <p:spPr/>
         <p:txBody>
+          <a:bodyPr>
+            <a:normAutofit lnSpcReduction="10000"/>
+          </a:bodyPr>
+          <a:lstStyle/>
+          <a:p>
+            <a:r>
+              <a:rPr lang="en-US" dirty="0"/>
+              <a:t>Background</a:t>
+            </a:r>
+          </a:p>
+          <a:p>
+            <a:pPr lvl="1"/>
+            <a:r>
+              <a:rPr lang="en-US" dirty="0"/>
+              <a:t>The Core</a:t>
+            </a:r>
+          </a:p>
+          <a:p>
+            <a:pPr lvl="1"/>
+            <a:r>
+              <a:rPr lang="en-US" dirty="0"/>
+              <a:t>AES &amp; It’s DFA Attack</a:t>
+            </a:r>
+          </a:p>
+          <a:p>
+            <a:r>
+              <a:rPr lang="en-US" dirty="0"/>
+              <a:t>Fault3r</a:t>
+            </a:r>
+          </a:p>
+          <a:p>
+            <a:r>
+              <a:rPr lang="en-US" dirty="0"/>
+              <a:t>Evaluation</a:t>
+            </a:r>
+          </a:p>
+          <a:p>
+            <a:pPr lvl="1"/>
+            <a:r>
+              <a:rPr lang="en-US" dirty="0"/>
+              <a:t>Simple Adder</a:t>
+            </a:r>
+          </a:p>
+          <a:p>
+            <a:pPr lvl="1"/>
+            <a:r>
+              <a:rPr lang="en-US" dirty="0"/>
+              <a:t>Breaking AES</a:t>
+            </a:r>
+          </a:p>
+          <a:p>
+            <a:pPr lvl="1"/>
+            <a:r>
+              <a:rPr lang="en-US" dirty="0"/>
+              <a:t>jump and link based faults</a:t>
+            </a:r>
+          </a:p>
+          <a:p>
+            <a:pPr lvl="1"/>
+            <a:r>
+              <a:rPr lang="en-US" dirty="0"/>
+              <a:t>Demo</a:t>
+            </a:r>
+          </a:p>
+          <a:p>
+            <a:r>
+              <a:rPr lang="en-US" dirty="0"/>
+              <a:t>Conclusion</a:t>
+            </a:r>
+          </a:p>
+        </p:txBody>
+      </p:sp>
+      <p:sp>
+        <p:nvSpPr>
+          <p:cNvPr id="4" name="Slide Number Placeholder 3">
+            <a:extLst>
+              <a:ext uri="{FF2B5EF4-FFF2-40B4-BE49-F238E27FC236}">
+                <a16:creationId xmlns:a16="http://schemas.microsoft.com/office/drawing/2014/main" id="{D510637B-05E1-04CB-D79A-A4EA1689957A}"/>
+              </a:ext>
+            </a:extLst>
+          </p:cNvPr>
+          <p:cNvSpPr>
+            <a:spLocks noGrp="1"/>
+          </p:cNvSpPr>
+          <p:nvPr>
+            <p:ph type="sldNum" sz="quarter" idx="12"/>
+          </p:nvPr>
+        </p:nvSpPr>
+        <p:spPr/>
+        <p:txBody>
           <a:bodyPr/>
           <a:lstStyle/>
           <a:p>
-            <a:r>
-              <a:rPr lang="en-US" dirty="0"/>
-              <a:t>Background</a:t>
-            </a:r>
-          </a:p>
-          <a:p>
-            <a:pPr lvl="1"/>
-            <a:r>
-              <a:rPr lang="en-US" dirty="0"/>
-              <a:t>The Core</a:t>
-            </a:r>
-          </a:p>
-          <a:p>
-            <a:pPr lvl="1"/>
-            <a:r>
-              <a:rPr lang="en-US" dirty="0"/>
-              <a:t>AES &amp; It’s DFA Attack</a:t>
-            </a:r>
-          </a:p>
-          <a:p>
-            <a:r>
-              <a:rPr lang="en-US" dirty="0"/>
-              <a:t>Fault3r</a:t>
-            </a:r>
-          </a:p>
-          <a:p>
-            <a:r>
-              <a:rPr lang="en-US" dirty="0"/>
-              <a:t>Evaluation</a:t>
-            </a:r>
-          </a:p>
-          <a:p>
-            <a:pPr lvl="1"/>
-            <a:r>
-              <a:rPr lang="en-US" dirty="0"/>
-              <a:t>Simple Adder</a:t>
-            </a:r>
-          </a:p>
-          <a:p>
-            <a:pPr lvl="1"/>
-            <a:r>
-              <a:rPr lang="en-US" dirty="0"/>
-              <a:t>Breaking AES</a:t>
-            </a:r>
-          </a:p>
-          <a:p>
-            <a:pPr lvl="1"/>
-            <a:r>
-              <a:rPr lang="en-US" dirty="0"/>
-              <a:t>jump and link based faults</a:t>
-            </a:r>
-          </a:p>
-          <a:p>
-            <a:r>
-              <a:rPr lang="en-US" dirty="0"/>
-              <a:t>Conclusion</a:t>
-            </a:r>
+            <a:fld id="{A900D188-C617-EB4E-BEE6-4D3EBC686279}" type="slidenum">
+              <a:rPr lang="en-US" smtClean="0"/>
+              <a:t>2</a:t>
+            </a:fld>
+            <a:endParaRPr lang="en-US"/>
           </a:p>
         </p:txBody>
       </p:sp>
@@ -15064,7 +15268,7 @@
         <p:spPr>
           <a:xfrm>
             <a:off x="7494730" y="2720115"/>
-            <a:ext cx="3859070" cy="2031325"/>
+            <a:ext cx="3676327" cy="2031325"/>
           </a:xfrm>
           <a:prstGeom prst="rect">
             <a:avLst/>
@@ -15085,7 +15289,7 @@
           <a:p>
             <a:r>
               <a:rPr lang="en-US" dirty="0"/>
-              <a:t>RV32IMC 2 Stage pipeline (IF + ID/EX)</a:t>
+              <a:t>RV32IC 2 Stage pipeline (IF + ID/EX)</a:t>
             </a:r>
           </a:p>
           <a:p>
@@ -15115,6 +15319,35 @@
               <a:rPr lang="en-US" dirty="0"/>
               <a:t>Simple SoC available</a:t>
             </a:r>
+          </a:p>
+        </p:txBody>
+      </p:sp>
+      <p:sp>
+        <p:nvSpPr>
+          <p:cNvPr id="3" name="Slide Number Placeholder 2">
+            <a:extLst>
+              <a:ext uri="{FF2B5EF4-FFF2-40B4-BE49-F238E27FC236}">
+                <a16:creationId xmlns:a16="http://schemas.microsoft.com/office/drawing/2014/main" id="{9B8E8C1E-1917-8EAE-B451-0FAC9BC7A66A}"/>
+              </a:ext>
+            </a:extLst>
+          </p:cNvPr>
+          <p:cNvSpPr>
+            <a:spLocks noGrp="1"/>
+          </p:cNvSpPr>
+          <p:nvPr>
+            <p:ph type="sldNum" sz="quarter" idx="12"/>
+          </p:nvPr>
+        </p:nvSpPr>
+        <p:spPr/>
+        <p:txBody>
+          <a:bodyPr/>
+          <a:lstStyle/>
+          <a:p>
+            <a:fld id="{A900D188-C617-EB4E-BEE6-4D3EBC686279}" type="slidenum">
+              <a:rPr lang="en-US" smtClean="0"/>
+              <a:t>3</a:t>
+            </a:fld>
+            <a:endParaRPr lang="en-US"/>
           </a:p>
         </p:txBody>
       </p:sp>
@@ -15539,6 +15772,35 @@
           </a:fontRef>
         </p:style>
       </p:cxnSp>
+      <p:sp>
+        <p:nvSpPr>
+          <p:cNvPr id="4" name="Slide Number Placeholder 3">
+            <a:extLst>
+              <a:ext uri="{FF2B5EF4-FFF2-40B4-BE49-F238E27FC236}">
+                <a16:creationId xmlns:a16="http://schemas.microsoft.com/office/drawing/2014/main" id="{63489BF2-8D8B-619A-A6C9-4F162B319B61}"/>
+              </a:ext>
+            </a:extLst>
+          </p:cNvPr>
+          <p:cNvSpPr>
+            <a:spLocks noGrp="1"/>
+          </p:cNvSpPr>
+          <p:nvPr>
+            <p:ph type="sldNum" sz="quarter" idx="12"/>
+          </p:nvPr>
+        </p:nvSpPr>
+        <p:spPr/>
+        <p:txBody>
+          <a:bodyPr/>
+          <a:lstStyle/>
+          <a:p>
+            <a:fld id="{A900D188-C617-EB4E-BEE6-4D3EBC686279}" type="slidenum">
+              <a:rPr lang="en-US" smtClean="0"/>
+              <a:t>4</a:t>
+            </a:fld>
+            <a:endParaRPr lang="en-US"/>
+          </a:p>
+        </p:txBody>
+      </p:sp>
     </p:spTree>
     <p:extLst>
       <p:ext uri="{BB962C8B-B14F-4D97-AF65-F5344CB8AC3E}">
@@ -16035,6 +16297,35 @@
           </a:p>
         </p:txBody>
       </p:sp>
+      <p:sp>
+        <p:nvSpPr>
+          <p:cNvPr id="6" name="Slide Number Placeholder 5">
+            <a:extLst>
+              <a:ext uri="{FF2B5EF4-FFF2-40B4-BE49-F238E27FC236}">
+                <a16:creationId xmlns:a16="http://schemas.microsoft.com/office/drawing/2014/main" id="{118F5881-C308-C798-AC4E-FD3DFC454A5F}"/>
+              </a:ext>
+            </a:extLst>
+          </p:cNvPr>
+          <p:cNvSpPr>
+            <a:spLocks noGrp="1"/>
+          </p:cNvSpPr>
+          <p:nvPr>
+            <p:ph type="sldNum" sz="quarter" idx="12"/>
+          </p:nvPr>
+        </p:nvSpPr>
+        <p:spPr/>
+        <p:txBody>
+          <a:bodyPr/>
+          <a:lstStyle/>
+          <a:p>
+            <a:fld id="{A900D188-C617-EB4E-BEE6-4D3EBC686279}" type="slidenum">
+              <a:rPr lang="en-US" smtClean="0"/>
+              <a:t>5</a:t>
+            </a:fld>
+            <a:endParaRPr lang="en-US"/>
+          </a:p>
+        </p:txBody>
+      </p:sp>
     </p:spTree>
     <p:extLst>
       <p:ext uri="{BB962C8B-B14F-4D97-AF65-F5344CB8AC3E}">
@@ -16543,8 +16834,8 @@
           </a:fontRef>
         </p:style>
       </p:cxnSp>
-      <mc:AlternateContent xmlns:mc="http://schemas.openxmlformats.org/markup-compatibility/2006">
-        <mc:Choice xmlns:a14="http://schemas.microsoft.com/office/drawing/2010/main" Requires="a14">
+      <mc:AlternateContent xmlns:mc="http://schemas.openxmlformats.org/markup-compatibility/2006" xmlns:a14="http://schemas.microsoft.com/office/drawing/2010/main">
+        <mc:Choice Requires="a14">
           <p:sp>
             <p:nvSpPr>
               <p:cNvPr id="18" name="TextBox 17">
@@ -16573,6 +16864,7 @@
               </a:bodyPr>
               <a:lstStyle/>
               <a:p>
+                <a:pPr/>
                 <a14:m>
                   <m:oMathPara xmlns:m="http://schemas.openxmlformats.org/officeDocument/2006/math">
                     <m:oMathParaPr>
@@ -16987,7 +17279,7 @@
             </p:txBody>
           </p:sp>
         </mc:Choice>
-        <mc:Fallback>
+        <mc:Fallback xmlns="">
           <p:sp>
             <p:nvSpPr>
               <p:cNvPr id="18" name="TextBox 17">
@@ -17110,6 +17402,35 @@
           </a:p>
         </p:txBody>
       </p:sp>
+      <p:sp>
+        <p:nvSpPr>
+          <p:cNvPr id="7" name="Slide Number Placeholder 6">
+            <a:extLst>
+              <a:ext uri="{FF2B5EF4-FFF2-40B4-BE49-F238E27FC236}">
+                <a16:creationId xmlns:a16="http://schemas.microsoft.com/office/drawing/2014/main" id="{0914FC43-CE2C-F5F3-108A-FC15F4ABAC8A}"/>
+              </a:ext>
+            </a:extLst>
+          </p:cNvPr>
+          <p:cNvSpPr>
+            <a:spLocks noGrp="1"/>
+          </p:cNvSpPr>
+          <p:nvPr>
+            <p:ph type="sldNum" sz="quarter" idx="12"/>
+          </p:nvPr>
+        </p:nvSpPr>
+        <p:spPr/>
+        <p:txBody>
+          <a:bodyPr/>
+          <a:lstStyle/>
+          <a:p>
+            <a:fld id="{A900D188-C617-EB4E-BEE6-4D3EBC686279}" type="slidenum">
+              <a:rPr lang="en-US" smtClean="0"/>
+              <a:t>6</a:t>
+            </a:fld>
+            <a:endParaRPr lang="en-US"/>
+          </a:p>
+        </p:txBody>
+      </p:sp>
     </p:spTree>
     <p:extLst>
       <p:ext uri="{BB962C8B-B14F-4D97-AF65-F5344CB8AC3E}">
@@ -17287,6 +17608,35 @@
               <a:rPr lang="en-US" sz="2400" dirty="0"/>
               <a:t>to obtain the original key k</a:t>
             </a:r>
+          </a:p>
+        </p:txBody>
+      </p:sp>
+      <p:sp>
+        <p:nvSpPr>
+          <p:cNvPr id="3" name="Slide Number Placeholder 2">
+            <a:extLst>
+              <a:ext uri="{FF2B5EF4-FFF2-40B4-BE49-F238E27FC236}">
+                <a16:creationId xmlns:a16="http://schemas.microsoft.com/office/drawing/2014/main" id="{301E828C-688A-DA85-5242-F56351544B70}"/>
+              </a:ext>
+            </a:extLst>
+          </p:cNvPr>
+          <p:cNvSpPr>
+            <a:spLocks noGrp="1"/>
+          </p:cNvSpPr>
+          <p:nvPr>
+            <p:ph type="sldNum" sz="quarter" idx="12"/>
+          </p:nvPr>
+        </p:nvSpPr>
+        <p:spPr/>
+        <p:txBody>
+          <a:bodyPr/>
+          <a:lstStyle/>
+          <a:p>
+            <a:fld id="{A900D188-C617-EB4E-BEE6-4D3EBC686279}" type="slidenum">
+              <a:rPr lang="en-US" smtClean="0"/>
+              <a:t>7</a:t>
+            </a:fld>
+            <a:endParaRPr lang="en-US"/>
           </a:p>
         </p:txBody>
       </p:sp>
@@ -17723,8 +18073,8 @@
         </p:nvSpPr>
         <p:spPr>
           <a:xfrm>
-            <a:off x="5382375" y="1615844"/>
-            <a:ext cx="1427250" cy="646331"/>
+            <a:off x="5384779" y="1788228"/>
+            <a:ext cx="1422441" cy="369332"/>
           </a:xfrm>
           <a:prstGeom prst="rect">
             <a:avLst/>
@@ -17740,13 +18090,6 @@
             <a:r>
               <a:rPr lang="en-US" i="1" dirty="0" err="1"/>
               <a:t>instr_addr_o</a:t>
-            </a:r>
-            <a:endParaRPr lang="en-US" i="1" dirty="0"/>
-          </a:p>
-          <a:p>
-            <a:r>
-              <a:rPr lang="en-US" i="1" dirty="0" err="1"/>
-              <a:t>instr_gnt_i</a:t>
             </a:r>
             <a:endParaRPr lang="en-US" i="1" dirty="0"/>
           </a:p>
@@ -17766,8 +18109,8 @@
         </p:nvSpPr>
         <p:spPr>
           <a:xfrm>
-            <a:off x="3071332" y="1888956"/>
-            <a:ext cx="1408847" cy="369332"/>
+            <a:off x="3071332" y="1603533"/>
+            <a:ext cx="1408847" cy="646331"/>
           </a:xfrm>
           <a:prstGeom prst="rect">
             <a:avLst/>
@@ -17783,6 +18126,13 @@
             <a:r>
               <a:rPr lang="en-US" i="1" dirty="0" err="1"/>
               <a:t>instr_rdata_i</a:t>
+            </a:r>
+            <a:endParaRPr lang="en-US" i="1" dirty="0"/>
+          </a:p>
+          <a:p>
+            <a:r>
+              <a:rPr lang="en-US" i="1" dirty="0" err="1"/>
+              <a:t>instr_gnt_i</a:t>
             </a:r>
             <a:endParaRPr lang="en-US" i="1" dirty="0"/>
           </a:p>
@@ -17869,6 +18219,35 @@
               <a:rPr lang="en-US" dirty="0"/>
               <a:t>: repeat fault on every subsequent visit if asserted</a:t>
             </a:r>
+          </a:p>
+        </p:txBody>
+      </p:sp>
+      <p:sp>
+        <p:nvSpPr>
+          <p:cNvPr id="3" name="Slide Number Placeholder 2">
+            <a:extLst>
+              <a:ext uri="{FF2B5EF4-FFF2-40B4-BE49-F238E27FC236}">
+                <a16:creationId xmlns:a16="http://schemas.microsoft.com/office/drawing/2014/main" id="{D9148BC7-858C-00D0-23E8-5511ACE4B32B}"/>
+              </a:ext>
+            </a:extLst>
+          </p:cNvPr>
+          <p:cNvSpPr>
+            <a:spLocks noGrp="1"/>
+          </p:cNvSpPr>
+          <p:nvPr>
+            <p:ph type="sldNum" sz="quarter" idx="12"/>
+          </p:nvPr>
+        </p:nvSpPr>
+        <p:spPr/>
+        <p:txBody>
+          <a:bodyPr/>
+          <a:lstStyle/>
+          <a:p>
+            <a:fld id="{A900D188-C617-EB4E-BEE6-4D3EBC686279}" type="slidenum">
+              <a:rPr lang="en-US" smtClean="0"/>
+              <a:t>8</a:t>
+            </a:fld>
+            <a:endParaRPr lang="en-US"/>
           </a:p>
         </p:txBody>
       </p:sp>
@@ -18375,6 +18754,35 @@
               <a:rPr lang="en-US" b="1" dirty="0"/>
               <a:t>Result</a:t>
             </a:r>
+          </a:p>
+        </p:txBody>
+      </p:sp>
+      <p:sp>
+        <p:nvSpPr>
+          <p:cNvPr id="3" name="Slide Number Placeholder 2">
+            <a:extLst>
+              <a:ext uri="{FF2B5EF4-FFF2-40B4-BE49-F238E27FC236}">
+                <a16:creationId xmlns:a16="http://schemas.microsoft.com/office/drawing/2014/main" id="{C0CD454E-4C93-61B7-C63F-7915ABD5A25B}"/>
+              </a:ext>
+            </a:extLst>
+          </p:cNvPr>
+          <p:cNvSpPr>
+            <a:spLocks noGrp="1"/>
+          </p:cNvSpPr>
+          <p:nvPr>
+            <p:ph type="sldNum" sz="quarter" idx="12"/>
+          </p:nvPr>
+        </p:nvSpPr>
+        <p:spPr/>
+        <p:txBody>
+          <a:bodyPr/>
+          <a:lstStyle/>
+          <a:p>
+            <a:fld id="{A900D188-C617-EB4E-BEE6-4D3EBC686279}" type="slidenum">
+              <a:rPr lang="en-US" smtClean="0"/>
+              <a:t>9</a:t>
+            </a:fld>
+            <a:endParaRPr lang="en-US"/>
           </a:p>
         </p:txBody>
       </p:sp>

--- a/fault3r.pptx
+++ b/fault3r.pptx
@@ -660,6 +660,90 @@
     <p:extLst>
       <p:ext uri="{BB962C8B-B14F-4D97-AF65-F5344CB8AC3E}">
         <p14:creationId xmlns:p14="http://schemas.microsoft.com/office/powerpoint/2010/main" val="594440463"/>
+      </p:ext>
+    </p:extLst>
+  </p:cSld>
+  <p:clrMapOvr>
+    <a:masterClrMapping/>
+  </p:clrMapOvr>
+</p:notes>
+</file>
+
+<file path=ppt/notesSlides/notesSlide3.xml><?xml version="1.0" encoding="utf-8"?>
+<p:notes xmlns:a="http://schemas.openxmlformats.org/drawingml/2006/main" xmlns:r="http://schemas.openxmlformats.org/officeDocument/2006/relationships" xmlns:p="http://schemas.openxmlformats.org/presentationml/2006/main">
+  <p:cSld>
+    <p:spTree>
+      <p:nvGrpSpPr>
+        <p:cNvPr id="1" name=""/>
+        <p:cNvGrpSpPr/>
+        <p:nvPr/>
+      </p:nvGrpSpPr>
+      <p:grpSpPr>
+        <a:xfrm>
+          <a:off x="0" y="0"/>
+          <a:ext cx="0" cy="0"/>
+          <a:chOff x="0" y="0"/>
+          <a:chExt cx="0" cy="0"/>
+        </a:xfrm>
+      </p:grpSpPr>
+      <p:sp>
+        <p:nvSpPr>
+          <p:cNvPr id="2" name="Slide Image Placeholder 1"/>
+          <p:cNvSpPr>
+            <a:spLocks noGrp="1" noRot="1" noChangeAspect="1"/>
+          </p:cNvSpPr>
+          <p:nvPr>
+            <p:ph type="sldImg"/>
+          </p:nvPr>
+        </p:nvSpPr>
+        <p:spPr/>
+      </p:sp>
+      <p:sp>
+        <p:nvSpPr>
+          <p:cNvPr id="3" name="Notes Placeholder 2"/>
+          <p:cNvSpPr>
+            <a:spLocks noGrp="1"/>
+          </p:cNvSpPr>
+          <p:nvPr>
+            <p:ph type="body" idx="1"/>
+          </p:nvPr>
+        </p:nvSpPr>
+        <p:spPr/>
+        <p:txBody>
+          <a:bodyPr/>
+          <a:lstStyle/>
+          <a:p>
+            <a:endParaRPr lang="en-US" dirty="0"/>
+          </a:p>
+        </p:txBody>
+      </p:sp>
+      <p:sp>
+        <p:nvSpPr>
+          <p:cNvPr id="4" name="Slide Number Placeholder 3"/>
+          <p:cNvSpPr>
+            <a:spLocks noGrp="1"/>
+          </p:cNvSpPr>
+          <p:nvPr>
+            <p:ph type="sldNum" sz="quarter" idx="5"/>
+          </p:nvPr>
+        </p:nvSpPr>
+        <p:spPr/>
+        <p:txBody>
+          <a:bodyPr/>
+          <a:lstStyle/>
+          <a:p>
+            <a:fld id="{95934FD2-01F4-0442-8F82-D8AAB346CE5A}" type="slidenum">
+              <a:rPr lang="en-US" smtClean="0"/>
+              <a:t>13</a:t>
+            </a:fld>
+            <a:endParaRPr lang="en-US"/>
+          </a:p>
+        </p:txBody>
+      </p:sp>
+    </p:spTree>
+    <p:extLst>
+      <p:ext uri="{BB962C8B-B14F-4D97-AF65-F5344CB8AC3E}">
+        <p14:creationId xmlns:p14="http://schemas.microsoft.com/office/powerpoint/2010/main" val="4131956339"/>
       </p:ext>
     </p:extLst>
   </p:cSld>
@@ -14830,10 +14914,15 @@
             <p:ph idx="1"/>
           </p:nvPr>
         </p:nvSpPr>
-        <p:spPr/>
+        <p:spPr>
+          <a:xfrm>
+            <a:off x="838200" y="1825625"/>
+            <a:ext cx="9967332" cy="4394200"/>
+          </a:xfrm>
+        </p:spPr>
         <p:txBody>
           <a:bodyPr>
-            <a:normAutofit lnSpcReduction="10000"/>
+            <a:normAutofit fontScale="92500" lnSpcReduction="20000"/>
           </a:bodyPr>
           <a:lstStyle/>
           <a:p>
@@ -14886,6 +14975,12 @@
             <a:r>
               <a:rPr lang="en-US" dirty="0"/>
               <a:t>Did end up learning a lot and this opened me a path to other projects.</a:t>
+            </a:r>
+          </a:p>
+          <a:p>
+            <a:r>
+              <a:rPr lang="en-US" dirty="0"/>
+              <a:t>Could potentially add UART, move Python script to PS side and have it run on hardware as a next step.</a:t>
             </a:r>
           </a:p>
           <a:p>
@@ -14910,8 +15005,8 @@
         </p:nvSpPr>
         <p:spPr>
           <a:xfrm>
-            <a:off x="11146220" y="0"/>
-            <a:ext cx="1045779" cy="6858000"/>
+            <a:off x="11353800" y="0"/>
+            <a:ext cx="838199" cy="6858000"/>
           </a:xfrm>
           <a:prstGeom prst="rect">
             <a:avLst/>
